--- a/src/ppt-super/assets/tpl-28-product-center/template.pptx
+++ b/src/ppt-super/assets/tpl-28-product-center/template.pptx
@@ -3136,7 +3136,14 @@
           <a:bodyPr rtlCol="0" anchor="ctr"/>
           <a:lstStyle/>
           <a:p>
-            <a:pPr algn="ctr"/>
+            <a:pPr algn="ctr">
+              <a:spcBef>
+                <a:spcPts val="0"/>
+              </a:spcBef>
+              <a:spcAft>
+                <a:spcPts val="0"/>
+              </a:spcAft>
+            </a:pPr>
           </a:p>
         </p:txBody>
       </p:sp>
@@ -3166,14 +3173,21 @@
               <a:lnSpc>
                 <a:spcPct val="112000"/>
               </a:lnSpc>
+              <a:spcBef>
+                <a:spcPts val="0"/>
+              </a:spcBef>
+              <a:spcAft>
+                <a:spcPts val="0"/>
+              </a:spcAft>
             </a:pPr>
             <a:r>
-              <a:rPr sz="1400" b="1" i="0">
+              <a:rPr sz="1400" b="1" i="0" lang="zh-CN" altLang="zh-CN">
                 <a:solidFill>
                   <a:srgbClr val="FFFFFF"/>
                 </a:solidFill>
                 <a:latin typeface="Microsoft YaHei"/>
                 <a:ea typeface="Microsoft YaHei"/>
+                <a:cs typeface="Microsoft YaHei"/>
               </a:rPr>
               <a:t>算力底座</a:t>
             </a:r>
@@ -3206,14 +3220,21 @@
               <a:lnSpc>
                 <a:spcPct val="112000"/>
               </a:lnSpc>
+              <a:spcBef>
+                <a:spcPts val="0"/>
+              </a:spcBef>
+              <a:spcAft>
+                <a:spcPts val="0"/>
+              </a:spcAft>
             </a:pPr>
             <a:r>
-              <a:rPr sz="2200" b="1" i="0">
+              <a:rPr sz="2200" b="1" i="0" lang="zh-CN" altLang="zh-CN">
                 <a:solidFill>
                   <a:srgbClr val="B90A0A"/>
                 </a:solidFill>
                 <a:latin typeface="Microsoft YaHei"/>
                 <a:ea typeface="Microsoft YaHei"/>
+                <a:cs typeface="Microsoft YaHei"/>
               </a:rPr>
               <a:t>Atlas 900 A3 SuperCluster: 万卡级训练集群, 有效算力利用率提升至 45%</a:t>
             </a:r>
@@ -3284,14 +3305,21 @@
               <a:lnSpc>
                 <a:spcPct val="112000"/>
               </a:lnSpc>
+              <a:spcBef>
+                <a:spcPts val="0"/>
+              </a:spcBef>
+              <a:spcAft>
+                <a:spcPts val="0"/>
+              </a:spcAft>
             </a:pPr>
             <a:r>
-              <a:rPr sz="1250" b="1" i="0">
+              <a:rPr sz="1250" b="1" i="0" lang="zh-CN" altLang="zh-CN">
                 <a:solidFill>
                   <a:srgbClr val="1F4E79"/>
                 </a:solidFill>
                 <a:latin typeface="Microsoft YaHei"/>
                 <a:ea typeface="Microsoft YaHei"/>
+                <a:cs typeface="Microsoft YaHei"/>
               </a:rPr>
               <a:t>面向万亿参数大模型训练的新一代 AI 算力底座,</a:t>
             </a:r>
@@ -3301,14 +3329,21 @@
               <a:lnSpc>
                 <a:spcPct val="112000"/>
               </a:lnSpc>
+              <a:spcBef>
+                <a:spcPts val="0"/>
+              </a:spcBef>
+              <a:spcAft>
+                <a:spcPts val="0"/>
+              </a:spcAft>
             </a:pPr>
             <a:r>
-              <a:rPr sz="1250" b="1" i="0">
+              <a:rPr sz="1250" b="1" i="0" lang="zh-CN" altLang="zh-CN">
                 <a:solidFill>
                   <a:srgbClr val="1F4E79"/>
                 </a:solidFill>
                 <a:latin typeface="Microsoft YaHei"/>
                 <a:ea typeface="Microsoft YaHei"/>
+                <a:cs typeface="Microsoft YaHei"/>
               </a:rPr>
               <a:t>算/网/存/电全栈协同设计, 开箱即训</a:t>
             </a:r>
@@ -3358,7 +3393,14 @@
           <a:bodyPr rtlCol="0" anchor="ctr"/>
           <a:lstStyle/>
           <a:p>
-            <a:pPr algn="ctr"/>
+            <a:pPr algn="ctr">
+              <a:spcBef>
+                <a:spcPts val="0"/>
+              </a:spcBef>
+              <a:spcAft>
+                <a:spcPts val="0"/>
+              </a:spcAft>
+            </a:pPr>
           </a:p>
         </p:txBody>
       </p:sp>
@@ -3388,14 +3430,21 @@
               <a:lnSpc>
                 <a:spcPct val="112000"/>
               </a:lnSpc>
+              <a:spcBef>
+                <a:spcPts val="0"/>
+              </a:spcBef>
+              <a:spcAft>
+                <a:spcPts val="0"/>
+              </a:spcAft>
             </a:pPr>
             <a:r>
-              <a:rPr sz="1000" b="0" i="0">
+              <a:rPr sz="1000" b="0" i="0" lang="zh-CN" altLang="zh-CN">
                 <a:solidFill>
                   <a:srgbClr val="595959"/>
                 </a:solidFill>
                 <a:latin typeface="Microsoft YaHei"/>
                 <a:ea typeface="Microsoft YaHei"/>
+                <a:cs typeface="Microsoft YaHei"/>
               </a:rPr>
               <a:t>AI 配图区</a:t>
             </a:r>
@@ -3444,7 +3493,14 @@
           <a:bodyPr rtlCol="0" anchor="ctr"/>
           <a:lstStyle/>
           <a:p>
-            <a:pPr algn="ctr"/>
+            <a:pPr algn="ctr">
+              <a:spcBef>
+                <a:spcPts val="0"/>
+              </a:spcBef>
+              <a:spcAft>
+                <a:spcPts val="0"/>
+              </a:spcAft>
+            </a:pPr>
           </a:p>
         </p:txBody>
       </p:sp>
@@ -3490,7 +3546,14 @@
           <a:bodyPr rtlCol="0" anchor="ctr"/>
           <a:lstStyle/>
           <a:p>
-            <a:pPr algn="ctr"/>
+            <a:pPr algn="ctr">
+              <a:spcBef>
+                <a:spcPts val="0"/>
+              </a:spcBef>
+              <a:spcAft>
+                <a:spcPts val="0"/>
+              </a:spcAft>
+            </a:pPr>
           </a:p>
         </p:txBody>
       </p:sp>
@@ -3536,7 +3599,14 @@
           <a:bodyPr rtlCol="0" anchor="ctr"/>
           <a:lstStyle/>
           <a:p>
-            <a:pPr algn="ctr"/>
+            <a:pPr algn="ctr">
+              <a:spcBef>
+                <a:spcPts val="0"/>
+              </a:spcBef>
+              <a:spcAft>
+                <a:spcPts val="0"/>
+              </a:spcAft>
+            </a:pPr>
           </a:p>
         </p:txBody>
       </p:sp>
@@ -3998,14 +4068,21 @@
               <a:lnSpc>
                 <a:spcPct val="112000"/>
               </a:lnSpc>
+              <a:spcBef>
+                <a:spcPts val="0"/>
+              </a:spcBef>
+              <a:spcAft>
+                <a:spcPts val="0"/>
+              </a:spcAft>
             </a:pPr>
             <a:r>
-              <a:rPr sz="1450" b="1" i="0">
+              <a:rPr sz="1450" b="1" i="0" lang="zh-CN" altLang="zh-CN">
                 <a:solidFill>
                   <a:srgbClr val="262626"/>
                 </a:solidFill>
                 <a:latin typeface="Microsoft YaHei"/>
                 <a:ea typeface="Microsoft YaHei"/>
+                <a:cs typeface="Microsoft YaHei"/>
               </a:rPr>
               <a:t>澎湃算力</a:t>
             </a:r>
@@ -4038,14 +4115,21 @@
               <a:lnSpc>
                 <a:spcPct val="112000"/>
               </a:lnSpc>
+              <a:spcBef>
+                <a:spcPts val="0"/>
+              </a:spcBef>
+              <a:spcAft>
+                <a:spcPts val="0"/>
+              </a:spcAft>
             </a:pPr>
             <a:r>
-              <a:rPr sz="1150" b="0" i="0">
+              <a:rPr sz="1150" b="0" i="0" lang="zh-CN" altLang="zh-CN">
                 <a:solidFill>
                   <a:srgbClr val="595959"/>
                 </a:solidFill>
                 <a:latin typeface="Microsoft YaHei"/>
                 <a:ea typeface="Microsoft YaHei"/>
+                <a:cs typeface="Microsoft YaHei"/>
               </a:rPr>
               <a:t>单集群 8192 张昇腾卡构成超节点, 训练算力达 256 PFLOPS,</a:t>
             </a:r>
@@ -4055,14 +4139,21 @@
               <a:lnSpc>
                 <a:spcPct val="112000"/>
               </a:lnSpc>
+              <a:spcBef>
+                <a:spcPts val="0"/>
+              </a:spcBef>
+              <a:spcAft>
+                <a:spcPts val="0"/>
+              </a:spcAft>
             </a:pPr>
             <a:r>
-              <a:rPr sz="1150" b="0" i="0">
+              <a:rPr sz="1150" b="0" i="0" lang="zh-CN" altLang="zh-CN">
                 <a:solidFill>
                   <a:srgbClr val="595959"/>
                 </a:solidFill>
                 <a:latin typeface="Microsoft YaHei"/>
                 <a:ea typeface="Microsoft YaHei"/>
+                <a:cs typeface="Microsoft YaHei"/>
               </a:rPr>
               <a:t>支持万亿参数 MoE 模型全参数训练</a:t>
             </a:r>
@@ -4145,7 +4236,14 @@
           <a:bodyPr rtlCol="0" anchor="ctr"/>
           <a:lstStyle/>
           <a:p>
-            <a:pPr algn="ctr"/>
+            <a:pPr algn="ctr">
+              <a:spcBef>
+                <a:spcPts val="0"/>
+              </a:spcBef>
+              <a:spcAft>
+                <a:spcPts val="0"/>
+              </a:spcAft>
+            </a:pPr>
           </a:p>
         </p:txBody>
       </p:sp>
@@ -4175,14 +4273,21 @@
               <a:lnSpc>
                 <a:spcPct val="112000"/>
               </a:lnSpc>
+              <a:spcBef>
+                <a:spcPts val="0"/>
+              </a:spcBef>
+              <a:spcAft>
+                <a:spcPts val="0"/>
+              </a:spcAft>
             </a:pPr>
             <a:r>
-              <a:rPr sz="1250" b="1" i="0">
+              <a:rPr sz="1250" b="1" i="0" lang="zh-CN" altLang="zh-CN">
                 <a:solidFill>
                   <a:srgbClr val="262626"/>
                 </a:solidFill>
                 <a:latin typeface="Microsoft YaHei"/>
                 <a:ea typeface="Microsoft YaHei"/>
+                <a:cs typeface="Microsoft YaHei"/>
               </a:rPr>
               <a:t>256 PFLOPS</a:t>
             </a:r>
@@ -4231,7 +4336,14 @@
           <a:bodyPr rtlCol="0" anchor="ctr"/>
           <a:lstStyle/>
           <a:p>
-            <a:pPr algn="ctr"/>
+            <a:pPr algn="ctr">
+              <a:spcBef>
+                <a:spcPts val="0"/>
+              </a:spcBef>
+              <a:spcAft>
+                <a:spcPts val="0"/>
+              </a:spcAft>
+            </a:pPr>
           </a:p>
         </p:txBody>
       </p:sp>
@@ -4275,7 +4387,14 @@
           <a:bodyPr rtlCol="0" anchor="ctr"/>
           <a:lstStyle/>
           <a:p>
-            <a:pPr algn="ctr"/>
+            <a:pPr algn="ctr">
+              <a:spcBef>
+                <a:spcPts val="0"/>
+              </a:spcBef>
+              <a:spcAft>
+                <a:spcPts val="0"/>
+              </a:spcAft>
+            </a:pPr>
           </a:p>
         </p:txBody>
       </p:sp>
@@ -4319,7 +4438,14 @@
           <a:bodyPr rtlCol="0" anchor="ctr"/>
           <a:lstStyle/>
           <a:p>
-            <a:pPr algn="ctr"/>
+            <a:pPr algn="ctr">
+              <a:spcBef>
+                <a:spcPts val="0"/>
+              </a:spcBef>
+              <a:spcAft>
+                <a:spcPts val="0"/>
+              </a:spcAft>
+            </a:pPr>
           </a:p>
         </p:txBody>
       </p:sp>
@@ -4363,7 +4489,14 @@
           <a:bodyPr rtlCol="0" anchor="ctr"/>
           <a:lstStyle/>
           <a:p>
-            <a:pPr algn="ctr"/>
+            <a:pPr algn="ctr">
+              <a:spcBef>
+                <a:spcPts val="0"/>
+              </a:spcBef>
+              <a:spcAft>
+                <a:spcPts val="0"/>
+              </a:spcAft>
+            </a:pPr>
           </a:p>
         </p:txBody>
       </p:sp>
@@ -4501,14 +4634,21 @@
               <a:lnSpc>
                 <a:spcPct val="112000"/>
               </a:lnSpc>
+              <a:spcBef>
+                <a:spcPts val="0"/>
+              </a:spcBef>
+              <a:spcAft>
+                <a:spcPts val="0"/>
+              </a:spcAft>
             </a:pPr>
             <a:r>
-              <a:rPr sz="1450" b="1" i="0">
+              <a:rPr sz="1450" b="1" i="0" lang="zh-CN" altLang="zh-CN">
                 <a:solidFill>
                   <a:srgbClr val="262626"/>
                 </a:solidFill>
                 <a:latin typeface="Microsoft YaHei"/>
                 <a:ea typeface="Microsoft YaHei"/>
+                <a:cs typeface="Microsoft YaHei"/>
               </a:rPr>
               <a:t>高速互联</a:t>
             </a:r>
@@ -4541,14 +4681,21 @@
               <a:lnSpc>
                 <a:spcPct val="112000"/>
               </a:lnSpc>
+              <a:spcBef>
+                <a:spcPts val="0"/>
+              </a:spcBef>
+              <a:spcAft>
+                <a:spcPts val="0"/>
+              </a:spcAft>
             </a:pPr>
             <a:r>
-              <a:rPr sz="1150" b="0" i="0">
+              <a:rPr sz="1150" b="0" i="0" lang="zh-CN" altLang="zh-CN">
                 <a:solidFill>
                   <a:srgbClr val="595959"/>
                 </a:solidFill>
                 <a:latin typeface="Microsoft YaHei"/>
                 <a:ea typeface="Microsoft YaHei"/>
+                <a:cs typeface="Microsoft YaHei"/>
               </a:rPr>
               <a:t>灵衢总线实现卡间 392GB/s 全互联, 跨节点通信时延降低 60%,</a:t>
             </a:r>
@@ -4558,14 +4705,21 @@
               <a:lnSpc>
                 <a:spcPct val="112000"/>
               </a:lnSpc>
+              <a:spcBef>
+                <a:spcPts val="0"/>
+              </a:spcBef>
+              <a:spcAft>
+                <a:spcPts val="0"/>
+              </a:spcAft>
             </a:pPr>
             <a:r>
-              <a:rPr sz="1150" b="0" i="0">
+              <a:rPr sz="1150" b="0" i="0" lang="zh-CN" altLang="zh-CN">
                 <a:solidFill>
                   <a:srgbClr val="595959"/>
                 </a:solidFill>
                 <a:latin typeface="Microsoft YaHei"/>
                 <a:ea typeface="Microsoft YaHei"/>
+                <a:cs typeface="Microsoft YaHei"/>
               </a:rPr>
               <a:t>打破集群规模扩展的互联墙</a:t>
             </a:r>
@@ -4648,7 +4802,14 @@
           <a:bodyPr rtlCol="0" anchor="ctr"/>
           <a:lstStyle/>
           <a:p>
-            <a:pPr algn="ctr"/>
+            <a:pPr algn="ctr">
+              <a:spcBef>
+                <a:spcPts val="0"/>
+              </a:spcBef>
+              <a:spcAft>
+                <a:spcPts val="0"/>
+              </a:spcAft>
+            </a:pPr>
           </a:p>
         </p:txBody>
       </p:sp>
@@ -4678,14 +4839,21 @@
               <a:lnSpc>
                 <a:spcPct val="112000"/>
               </a:lnSpc>
+              <a:spcBef>
+                <a:spcPts val="0"/>
+              </a:spcBef>
+              <a:spcAft>
+                <a:spcPts val="0"/>
+              </a:spcAft>
             </a:pPr>
             <a:r>
-              <a:rPr sz="1250" b="1" i="0">
+              <a:rPr sz="1250" b="1" i="0" lang="zh-CN" altLang="zh-CN">
                 <a:solidFill>
                   <a:srgbClr val="262626"/>
                 </a:solidFill>
                 <a:latin typeface="Microsoft YaHei"/>
                 <a:ea typeface="Microsoft YaHei"/>
+                <a:cs typeface="Microsoft YaHei"/>
               </a:rPr>
               <a:t>带宽 392GB/s</a:t>
             </a:r>
@@ -4734,7 +4902,14 @@
           <a:bodyPr rtlCol="0" anchor="ctr"/>
           <a:lstStyle/>
           <a:p>
-            <a:pPr algn="ctr"/>
+            <a:pPr algn="ctr">
+              <a:spcBef>
+                <a:spcPts val="0"/>
+              </a:spcBef>
+              <a:spcAft>
+                <a:spcPts val="0"/>
+              </a:spcAft>
+            </a:pPr>
           </a:p>
         </p:txBody>
       </p:sp>
@@ -4746,8 +4921,8 @@
         </p:nvSpPr>
         <p:spPr>
           <a:xfrm>
-            <a:off x="520700" y="3411681"/>
-            <a:ext cx="254000" cy="254000"/>
+            <a:off x="448437" y="3322209"/>
+            <a:ext cx="398526" cy="432943"/>
           </a:xfrm>
           <a:prstGeom prst="rect">
             <a:avLst/>
@@ -4764,14 +4939,21 @@
               <a:lnSpc>
                 <a:spcPct val="112000"/>
               </a:lnSpc>
+              <a:spcBef>
+                <a:spcPts val="0"/>
+              </a:spcBef>
+              <a:spcAft>
+                <a:spcPts val="0"/>
+              </a:spcAft>
             </a:pPr>
             <a:r>
-              <a:rPr sz="2600" b="1" i="0">
+              <a:rPr sz="2600" b="1" i="0" lang="zh-CN" altLang="zh-CN">
                 <a:solidFill>
                   <a:srgbClr val="1F4E79"/>
                 </a:solidFill>
                 <a:latin typeface="Microsoft YaHei"/>
                 <a:ea typeface="Microsoft YaHei"/>
+                <a:cs typeface="Microsoft YaHei"/>
               </a:rPr>
               <a:t>⚙</a:t>
             </a:r>
@@ -4804,14 +4986,21 @@
               <a:lnSpc>
                 <a:spcPct val="112000"/>
               </a:lnSpc>
+              <a:spcBef>
+                <a:spcPts val="0"/>
+              </a:spcBef>
+              <a:spcAft>
+                <a:spcPts val="0"/>
+              </a:spcAft>
             </a:pPr>
             <a:r>
-              <a:rPr sz="1450" b="1" i="0">
+              <a:rPr sz="1450" b="1" i="0" lang="zh-CN" altLang="zh-CN">
                 <a:solidFill>
                   <a:srgbClr val="262626"/>
                 </a:solidFill>
                 <a:latin typeface="Microsoft YaHei"/>
                 <a:ea typeface="Microsoft YaHei"/>
+                <a:cs typeface="Microsoft YaHei"/>
               </a:rPr>
               <a:t>软硬协同</a:t>
             </a:r>
@@ -4844,14 +5033,21 @@
               <a:lnSpc>
                 <a:spcPct val="112000"/>
               </a:lnSpc>
+              <a:spcBef>
+                <a:spcPts val="0"/>
+              </a:spcBef>
+              <a:spcAft>
+                <a:spcPts val="0"/>
+              </a:spcAft>
             </a:pPr>
             <a:r>
-              <a:rPr sz="1150" b="0" i="0">
+              <a:rPr sz="1150" b="0" i="0" lang="zh-CN" altLang="zh-CN">
                 <a:solidFill>
                   <a:srgbClr val="595959"/>
                 </a:solidFill>
                 <a:latin typeface="Microsoft YaHei"/>
                 <a:ea typeface="Microsoft YaHei"/>
+                <a:cs typeface="Microsoft YaHei"/>
               </a:rPr>
               <a:t>CANN 算子深度优化 + MindSpore 并行策略自动搜索,</a:t>
             </a:r>
@@ -4861,14 +5057,21 @@
               <a:lnSpc>
                 <a:spcPct val="112000"/>
               </a:lnSpc>
+              <a:spcBef>
+                <a:spcPts val="0"/>
+              </a:spcBef>
+              <a:spcAft>
+                <a:spcPts val="0"/>
+              </a:spcAft>
             </a:pPr>
             <a:r>
-              <a:rPr sz="1150" b="0" i="0">
+              <a:rPr sz="1150" b="0" i="0" lang="zh-CN" altLang="zh-CN">
                 <a:solidFill>
                   <a:srgbClr val="595959"/>
                 </a:solidFill>
                 <a:latin typeface="Microsoft YaHei"/>
                 <a:ea typeface="Microsoft YaHei"/>
+                <a:cs typeface="Microsoft YaHei"/>
               </a:rPr>
               <a:t>大模型训练 MFU 从 30% 提升至 45%</a:t>
             </a:r>
@@ -4951,7 +5154,14 @@
           <a:bodyPr rtlCol="0" anchor="ctr"/>
           <a:lstStyle/>
           <a:p>
-            <a:pPr algn="ctr"/>
+            <a:pPr algn="ctr">
+              <a:spcBef>
+                <a:spcPts val="0"/>
+              </a:spcBef>
+              <a:spcAft>
+                <a:spcPts val="0"/>
+              </a:spcAft>
+            </a:pPr>
           </a:p>
         </p:txBody>
       </p:sp>
@@ -4981,14 +5191,21 @@
               <a:lnSpc>
                 <a:spcPct val="112000"/>
               </a:lnSpc>
+              <a:spcBef>
+                <a:spcPts val="0"/>
+              </a:spcBef>
+              <a:spcAft>
+                <a:spcPts val="0"/>
+              </a:spcAft>
             </a:pPr>
             <a:r>
-              <a:rPr sz="1250" b="1" i="0">
+              <a:rPr sz="1250" b="1" i="0" lang="zh-CN" altLang="zh-CN">
                 <a:solidFill>
                   <a:srgbClr val="262626"/>
                 </a:solidFill>
                 <a:latin typeface="Microsoft YaHei"/>
                 <a:ea typeface="Microsoft YaHei"/>
+                <a:cs typeface="Microsoft YaHei"/>
               </a:rPr>
               <a:t>MFU 达 45%</a:t>
             </a:r>
@@ -5037,7 +5254,14 @@
           <a:bodyPr rtlCol="0" anchor="ctr"/>
           <a:lstStyle/>
           <a:p>
-            <a:pPr algn="ctr"/>
+            <a:pPr algn="ctr">
+              <a:spcBef>
+                <a:spcPts val="0"/>
+              </a:spcBef>
+              <a:spcAft>
+                <a:spcPts val="0"/>
+              </a:spcAft>
+            </a:pPr>
           </a:p>
         </p:txBody>
       </p:sp>
@@ -5083,7 +5307,14 @@
           <a:bodyPr rtlCol="0" anchor="ctr"/>
           <a:lstStyle/>
           <a:p>
-            <a:pPr algn="ctr"/>
+            <a:pPr algn="ctr">
+              <a:spcBef>
+                <a:spcPts val="0"/>
+              </a:spcBef>
+              <a:spcAft>
+                <a:spcPts val="0"/>
+              </a:spcAft>
+            </a:pPr>
           </a:p>
         </p:txBody>
       </p:sp>
@@ -5113,14 +5344,21 @@
               <a:lnSpc>
                 <a:spcPct val="112000"/>
               </a:lnSpc>
+              <a:spcBef>
+                <a:spcPts val="0"/>
+              </a:spcBef>
+              <a:spcAft>
+                <a:spcPts val="0"/>
+              </a:spcAft>
             </a:pPr>
             <a:r>
-              <a:rPr sz="1500" b="1" i="0">
+              <a:rPr sz="1500" b="1" i="0" lang="zh-CN" altLang="zh-CN">
                 <a:solidFill>
                   <a:srgbClr val="1F4E79"/>
                 </a:solidFill>
                 <a:latin typeface="Microsoft YaHei"/>
                 <a:ea typeface="Microsoft YaHei"/>
+                <a:cs typeface="Microsoft YaHei"/>
               </a:rPr>
               <a:t>✓</a:t>
             </a:r>
@@ -5153,14 +5391,21 @@
               <a:lnSpc>
                 <a:spcPct val="112000"/>
               </a:lnSpc>
+              <a:spcBef>
+                <a:spcPts val="0"/>
+              </a:spcBef>
+              <a:spcAft>
+                <a:spcPts val="0"/>
+              </a:spcAft>
             </a:pPr>
             <a:r>
-              <a:rPr sz="1450" b="1" i="0">
+              <a:rPr sz="1450" b="1" i="0" lang="zh-CN" altLang="zh-CN">
                 <a:solidFill>
                   <a:srgbClr val="262626"/>
                 </a:solidFill>
                 <a:latin typeface="Microsoft YaHei"/>
                 <a:ea typeface="Microsoft YaHei"/>
+                <a:cs typeface="Microsoft YaHei"/>
               </a:rPr>
               <a:t>稳定可靠</a:t>
             </a:r>
@@ -5193,14 +5438,21 @@
               <a:lnSpc>
                 <a:spcPct val="112000"/>
               </a:lnSpc>
+              <a:spcBef>
+                <a:spcPts val="0"/>
+              </a:spcBef>
+              <a:spcAft>
+                <a:spcPts val="0"/>
+              </a:spcAft>
             </a:pPr>
             <a:r>
-              <a:rPr sz="1150" b="0" i="0">
+              <a:rPr sz="1150" b="0" i="0" lang="zh-CN" altLang="zh-CN">
                 <a:solidFill>
                   <a:srgbClr val="595959"/>
                 </a:solidFill>
                 <a:latin typeface="Microsoft YaHei"/>
                 <a:ea typeface="Microsoft YaHei"/>
+                <a:cs typeface="Microsoft YaHei"/>
               </a:rPr>
               <a:t>全链路故障秒级感知, 断点续训自动恢复小于 10 分钟,</a:t>
             </a:r>
@@ -5210,14 +5462,21 @@
               <a:lnSpc>
                 <a:spcPct val="112000"/>
               </a:lnSpc>
+              <a:spcBef>
+                <a:spcPts val="0"/>
+              </a:spcBef>
+              <a:spcAft>
+                <a:spcPts val="0"/>
+              </a:spcAft>
             </a:pPr>
             <a:r>
-              <a:rPr sz="1150" b="0" i="0">
+              <a:rPr sz="1150" b="0" i="0" lang="zh-CN" altLang="zh-CN">
                 <a:solidFill>
                   <a:srgbClr val="595959"/>
                 </a:solidFill>
                 <a:latin typeface="Microsoft YaHei"/>
                 <a:ea typeface="Microsoft YaHei"/>
+                <a:cs typeface="Microsoft YaHei"/>
               </a:rPr>
               <a:t>支撑千卡任务 30 天连续训练无中断</a:t>
             </a:r>
@@ -5300,7 +5559,14 @@
           <a:bodyPr rtlCol="0" anchor="ctr"/>
           <a:lstStyle/>
           <a:p>
-            <a:pPr algn="ctr"/>
+            <a:pPr algn="ctr">
+              <a:spcBef>
+                <a:spcPts val="0"/>
+              </a:spcBef>
+              <a:spcAft>
+                <a:spcPts val="0"/>
+              </a:spcAft>
+            </a:pPr>
           </a:p>
         </p:txBody>
       </p:sp>
@@ -5330,14 +5596,21 @@
               <a:lnSpc>
                 <a:spcPct val="112000"/>
               </a:lnSpc>
+              <a:spcBef>
+                <a:spcPts val="0"/>
+              </a:spcBef>
+              <a:spcAft>
+                <a:spcPts val="0"/>
+              </a:spcAft>
             </a:pPr>
             <a:r>
-              <a:rPr sz="1250" b="1" i="0">
+              <a:rPr sz="1250" b="1" i="0" lang="zh-CN" altLang="zh-CN">
                 <a:solidFill>
                   <a:srgbClr val="262626"/>
                 </a:solidFill>
                 <a:latin typeface="Microsoft YaHei"/>
                 <a:ea typeface="Microsoft YaHei"/>
+                <a:cs typeface="Microsoft YaHei"/>
               </a:rPr>
               <a:t>恢复 &lt;10min</a:t>
             </a:r>
@@ -5420,7 +5693,14 @@
           <a:bodyPr rtlCol="0" anchor="ctr"/>
           <a:lstStyle/>
           <a:p>
-            <a:pPr algn="ctr"/>
+            <a:pPr algn="ctr">
+              <a:spcBef>
+                <a:spcPts val="0"/>
+              </a:spcBef>
+              <a:spcAft>
+                <a:spcPts val="0"/>
+              </a:spcAft>
+            </a:pPr>
           </a:p>
         </p:txBody>
       </p:sp>
@@ -5500,7 +5780,14 @@
           <a:bodyPr rtlCol="0" anchor="ctr"/>
           <a:lstStyle/>
           <a:p>
-            <a:pPr algn="ctr"/>
+            <a:pPr algn="ctr">
+              <a:spcBef>
+                <a:spcPts val="0"/>
+              </a:spcBef>
+              <a:spcAft>
+                <a:spcPts val="0"/>
+              </a:spcAft>
+            </a:pPr>
           </a:p>
         </p:txBody>
       </p:sp>
@@ -5580,7 +5867,14 @@
           <a:bodyPr rtlCol="0" anchor="ctr"/>
           <a:lstStyle/>
           <a:p>
-            <a:pPr algn="ctr"/>
+            <a:pPr algn="ctr">
+              <a:spcBef>
+                <a:spcPts val="0"/>
+              </a:spcBef>
+              <a:spcAft>
+                <a:spcPts val="0"/>
+              </a:spcAft>
+            </a:pPr>
           </a:p>
         </p:txBody>
       </p:sp>
@@ -5660,7 +5954,14 @@
           <a:bodyPr rtlCol="0" anchor="ctr"/>
           <a:lstStyle/>
           <a:p>
-            <a:pPr algn="ctr"/>
+            <a:pPr algn="ctr">
+              <a:spcBef>
+                <a:spcPts val="0"/>
+              </a:spcBef>
+              <a:spcAft>
+                <a:spcPts val="0"/>
+              </a:spcAft>
+            </a:pPr>
           </a:p>
         </p:txBody>
       </p:sp>
@@ -5690,14 +5991,21 @@
               <a:lnSpc>
                 <a:spcPct val="112000"/>
               </a:lnSpc>
+              <a:spcBef>
+                <a:spcPts val="0"/>
+              </a:spcBef>
+              <a:spcAft>
+                <a:spcPts val="0"/>
+              </a:spcAft>
             </a:pPr>
             <a:r>
-              <a:rPr sz="1050" b="0" i="0">
+              <a:rPr sz="1050" b="0" i="0" lang="zh-CN" altLang="zh-CN">
                 <a:solidFill>
                   <a:srgbClr val="595959"/>
                 </a:solidFill>
                 <a:latin typeface="Microsoft YaHei"/>
                 <a:ea typeface="Microsoft YaHei"/>
+                <a:cs typeface="Microsoft YaHei"/>
               </a:rPr>
               <a:t>图: Atlas 900 A3 SuperCluster 液冷整机柜集群机房实景</a:t>
             </a:r>
@@ -5744,7 +6052,14 @@
           <a:bodyPr rtlCol="0" anchor="ctr"/>
           <a:lstStyle/>
           <a:p>
-            <a:pPr algn="ctr"/>
+            <a:pPr algn="ctr">
+              <a:spcBef>
+                <a:spcPts val="0"/>
+              </a:spcBef>
+              <a:spcAft>
+                <a:spcPts val="0"/>
+              </a:spcAft>
+            </a:pPr>
           </a:p>
         </p:txBody>
       </p:sp>
@@ -5774,14 +6089,21 @@
               <a:lnSpc>
                 <a:spcPct val="112000"/>
               </a:lnSpc>
+              <a:spcBef>
+                <a:spcPts val="0"/>
+              </a:spcBef>
+              <a:spcAft>
+                <a:spcPts val="0"/>
+              </a:spcAft>
             </a:pPr>
             <a:r>
-              <a:rPr sz="1250" b="1" i="0">
+              <a:rPr sz="1250" b="1" i="0" lang="zh-CN" altLang="zh-CN">
                 <a:solidFill>
                   <a:srgbClr val="262626"/>
                 </a:solidFill>
                 <a:latin typeface="Microsoft YaHei"/>
                 <a:ea typeface="Microsoft YaHei"/>
+                <a:cs typeface="Microsoft YaHei"/>
               </a:rPr>
               <a:t>单集群 8192 卡</a:t>
             </a:r>
@@ -5828,7 +6150,14 @@
           <a:bodyPr rtlCol="0" anchor="ctr"/>
           <a:lstStyle/>
           <a:p>
-            <a:pPr algn="ctr"/>
+            <a:pPr algn="ctr">
+              <a:spcBef>
+                <a:spcPts val="0"/>
+              </a:spcBef>
+              <a:spcAft>
+                <a:spcPts val="0"/>
+              </a:spcAft>
+            </a:pPr>
           </a:p>
         </p:txBody>
       </p:sp>
@@ -5858,14 +6187,21 @@
               <a:lnSpc>
                 <a:spcPct val="112000"/>
               </a:lnSpc>
+              <a:spcBef>
+                <a:spcPts val="0"/>
+              </a:spcBef>
+              <a:spcAft>
+                <a:spcPts val="0"/>
+              </a:spcAft>
             </a:pPr>
             <a:r>
-              <a:rPr sz="1250" b="1" i="0">
+              <a:rPr sz="1250" b="1" i="0" lang="zh-CN" altLang="zh-CN">
                 <a:solidFill>
                   <a:srgbClr val="262626"/>
                 </a:solidFill>
                 <a:latin typeface="Microsoft YaHei"/>
                 <a:ea typeface="Microsoft YaHei"/>
+                <a:cs typeface="Microsoft YaHei"/>
               </a:rPr>
               <a:t>训练 MFU 45%</a:t>
             </a:r>
@@ -5912,7 +6248,14 @@
           <a:bodyPr rtlCol="0" anchor="ctr"/>
           <a:lstStyle/>
           <a:p>
-            <a:pPr algn="ctr"/>
+            <a:pPr algn="ctr">
+              <a:spcBef>
+                <a:spcPts val="0"/>
+              </a:spcBef>
+              <a:spcAft>
+                <a:spcPts val="0"/>
+              </a:spcAft>
+            </a:pPr>
           </a:p>
         </p:txBody>
       </p:sp>
@@ -5942,14 +6285,21 @@
               <a:lnSpc>
                 <a:spcPct val="112000"/>
               </a:lnSpc>
+              <a:spcBef>
+                <a:spcPts val="0"/>
+              </a:spcBef>
+              <a:spcAft>
+                <a:spcPts val="0"/>
+              </a:spcAft>
             </a:pPr>
             <a:r>
-              <a:rPr sz="1250" b="1" i="0">
+              <a:rPr sz="1250" b="1" i="0" lang="zh-CN" altLang="zh-CN">
                 <a:solidFill>
                   <a:srgbClr val="262626"/>
                 </a:solidFill>
                 <a:latin typeface="Microsoft YaHei"/>
                 <a:ea typeface="Microsoft YaHei"/>
+                <a:cs typeface="Microsoft YaHei"/>
               </a:rPr>
               <a:t>故障恢复 &lt;10min</a:t>
             </a:r>
@@ -5996,7 +6346,14 @@
           <a:bodyPr rtlCol="0" anchor="ctr"/>
           <a:lstStyle/>
           <a:p>
-            <a:pPr algn="ctr"/>
+            <a:pPr algn="ctr">
+              <a:spcBef>
+                <a:spcPts val="0"/>
+              </a:spcBef>
+              <a:spcAft>
+                <a:spcPts val="0"/>
+              </a:spcAft>
+            </a:pPr>
           </a:p>
         </p:txBody>
       </p:sp>
@@ -6040,7 +6397,14 @@
           <a:bodyPr rtlCol="0" anchor="ctr"/>
           <a:lstStyle/>
           <a:p>
-            <a:pPr algn="ctr"/>
+            <a:pPr algn="ctr">
+              <a:spcBef>
+                <a:spcPts val="0"/>
+              </a:spcBef>
+              <a:spcAft>
+                <a:spcPts val="0"/>
+              </a:spcAft>
+            </a:pPr>
           </a:p>
         </p:txBody>
       </p:sp>
@@ -6070,14 +6434,21 @@
               <a:lnSpc>
                 <a:spcPct val="112000"/>
               </a:lnSpc>
+              <a:spcBef>
+                <a:spcPts val="0"/>
+              </a:spcBef>
+              <a:spcAft>
+                <a:spcPts val="0"/>
+              </a:spcAft>
             </a:pPr>
             <a:r>
-              <a:rPr sz="1400" b="1" i="0">
+              <a:rPr sz="1400" b="1" i="0" lang="zh-CN" altLang="zh-CN">
                 <a:solidFill>
                   <a:srgbClr val="1F4E79"/>
                 </a:solidFill>
                 <a:latin typeface="Microsoft YaHei"/>
                 <a:ea typeface="Microsoft YaHei"/>
+                <a:cs typeface="Microsoft YaHei"/>
               </a:rPr>
               <a:t>以超节点架构同时打破算力墙与互联墙, 支撑万亿参数模型 30 天连续训练, 下一步向 3.2 万卡集群规模演进</a:t>
             </a:r>
@@ -6124,7 +6495,14 @@
           <a:bodyPr rtlCol="0" anchor="ctr"/>
           <a:lstStyle/>
           <a:p>
-            <a:pPr algn="ctr"/>
+            <a:pPr algn="ctr">
+              <a:spcBef>
+                <a:spcPts val="0"/>
+              </a:spcBef>
+              <a:spcAft>
+                <a:spcPts val="0"/>
+              </a:spcAft>
+            </a:pPr>
           </a:p>
         </p:txBody>
       </p:sp>
@@ -6154,14 +6532,21 @@
               <a:lnSpc>
                 <a:spcPct val="112000"/>
               </a:lnSpc>
+              <a:spcBef>
+                <a:spcPts val="0"/>
+              </a:spcBef>
+              <a:spcAft>
+                <a:spcPts val="0"/>
+              </a:spcAft>
             </a:pPr>
             <a:r>
-              <a:rPr sz="1350" b="1" i="0">
+              <a:rPr sz="1350" b="1" i="0" lang="zh-CN" altLang="zh-CN">
                 <a:solidFill>
                   <a:srgbClr val="262626"/>
                 </a:solidFill>
                 <a:latin typeface="Microsoft YaHei"/>
                 <a:ea typeface="Microsoft YaHei"/>
+                <a:cs typeface="Microsoft YaHei"/>
               </a:rPr>
               <a:t>已商用 11 个集群</a:t>
             </a:r>
